--- a/AI_Council_Summit_2026_Westernacher.pptx
+++ b/AI_Council_Summit_2026_Westernacher.pptx
@@ -10205,7 +10205,7 @@
                 <a:ea typeface="Arial" pitchFamily="34" charset="-122"/>
                 <a:cs typeface="Arial" pitchFamily="34" charset="-120"/>
               </a:rPr>
-              <a:t>bindx-consulting.github.io/westernacher-ai-desk</a:t>
+              <a:t>bindx-consulting.github.io/westernacher-ai-desk/wepulse.html</a:t>
             </a:r>
             <a:endParaRPr lang="en-US" sz="900" dirty="0"/>
           </a:p>

--- a/AI_Council_Summit_2026_Westernacher.pptx
+++ b/AI_Council_Summit_2026_Westernacher.pptx
@@ -10205,7 +10205,7 @@
                 <a:ea typeface="Arial" pitchFamily="34" charset="-122"/>
                 <a:cs typeface="Arial" pitchFamily="34" charset="-120"/>
               </a:rPr>
-              <a:t>bindx-consulting.github.io/westernacher-ai-desk/wepulse.html</a:t>
+              <a:t>bindx-consulting.github.io/westernacher-ai-regional-meeting/wepulse.html</a:t>
             </a:r>
             <a:endParaRPr lang="en-US" sz="900" dirty="0"/>
           </a:p>
@@ -10979,7 +10979,7 @@
                 <a:ea typeface="Arial" pitchFamily="34" charset="-122"/>
                 <a:cs typeface="Arial" pitchFamily="34" charset="-120"/>
               </a:rPr>
-              <a:t>bindx-consulting.github.io/westernacher-ai-desk</a:t>
+              <a:t>bindx-consulting.github.io/westernacher-ai-regional-meeting</a:t>
             </a:r>
             <a:endParaRPr lang="en-US" sz="900" dirty="0"/>
           </a:p>
